--- a/assets/slides/lecture-07-slides.pptx
+++ b/assets/slides/lecture-07-slides.pptx
@@ -390,12 +390,12 @@
               <a:defRPr/>
             </a:pPr>
             <a:r>
-              <a:rPr lang="en-US" dirty="0"/>
+              <a:rPr lang="fr-FR" dirty="0"/>
               <a:t>Image: https://www.solomotorcontrollers.com/blog/electromagnetic-interference-emi/</a:t>
             </a:r>
           </a:p>
           <a:p>
-            <a:endParaRPr dirty="0"/>
+            <a:endParaRPr lang="fr-FR" dirty="0"/>
           </a:p>
         </p:txBody>
       </p:sp>
@@ -11068,8 +11068,8 @@
         </p:nvSpPr>
         <p:spPr>
           <a:xfrm>
-            <a:off x="868680" y="1828800"/>
-            <a:ext cx="10469880" cy="1417320"/>
+            <a:off x="868680" y="2075795"/>
+            <a:ext cx="10469880" cy="923330"/>
           </a:xfrm>
           <a:prstGeom prst="rect">
             <a:avLst/>
@@ -11084,14 +11084,20 @@
           <a:p>
             <a:pPr algn="ctr"/>
             <a:r>
-              <a:rPr sz="3000" b="1" i="0" dirty="0">
+              <a:rPr lang="en-US" sz="3000" b="1" i="0" dirty="0">
                 <a:solidFill>
                   <a:srgbClr val="17324D"/>
                 </a:solidFill>
                 <a:latin typeface="Aptos Display"/>
               </a:rPr>
-              <a:t>A quiet neighboring line shows a smaller unwanted signal after it is turned 90 degrees. What claim is supported?</a:t>
-            </a:r>
+              <a:t>Two nearby wires are not electrically connected, yet a changing voltage on one produces a signal on the other.</a:t>
+            </a:r>
+            <a:endParaRPr sz="3000" b="1" i="0" dirty="0">
+              <a:solidFill>
+                <a:srgbClr val="17324D"/>
+              </a:solidFill>
+              <a:latin typeface="Aptos Display"/>
+            </a:endParaRPr>
           </a:p>
         </p:txBody>
       </p:sp>

--- a/assets/slides/lecture-07-slides.pptx
+++ b/assets/slides/lecture-07-slides.pptx
@@ -4223,41 +4223,6 @@
           <a:p>
             <a:pPr algn="ctr"/>
             <a:endParaRPr/>
-          </a:p>
-        </p:txBody>
-      </p:sp>
-      <p:sp>
-        <p:nvSpPr>
-          <p:cNvPr id="11" name="TextBox 10"/>
-          <p:cNvSpPr txBox="1"/>
-          <p:nvPr/>
-        </p:nvSpPr>
-        <p:spPr>
-          <a:xfrm>
-            <a:off x="2871216" y="5230368"/>
-            <a:ext cx="2377440" cy="420624"/>
-          </a:xfrm>
-          <a:prstGeom prst="rect">
-            <a:avLst/>
-          </a:prstGeom>
-          <a:noFill/>
-        </p:spPr>
-        <p:txBody>
-          <a:bodyPr wrap="square" lIns="18288" tIns="18288" rIns="18288" bIns="18288" anchor="ctr">
-            <a:spAutoFit/>
-          </a:bodyPr>
-          <a:lstStyle/>
-          <a:p>
-            <a:pPr algn="ctr"/>
-            <a:r>
-              <a:rPr sz="1150" b="1" i="0">
-                <a:solidFill>
-                  <a:srgbClr val="FFFFFF"/>
-                </a:solidFill>
-                <a:latin typeface="Aptos"/>
-              </a:rPr>
-              <a:t>50-MINUTE SESSION</a:t>
-            </a:r>
           </a:p>
         </p:txBody>
       </p:sp>
